--- a/PharmaCare_PMS_.pptx
+++ b/PharmaCare_PMS_.pptx
@@ -302,7 +302,7 @@
           <a:p>
             <a:fld id="{48A87A34-81AB-432B-8DAE-1953F412C126}" type="datetimeFigureOut">
               <a:rPr lang="en-US" smtClean="0"/>
-              <a:t>5/9/2026</a:t>
+              <a:t>5/10/2026</a:t>
             </a:fld>
             <a:endParaRPr lang="en-US" dirty="0"/>
           </a:p>
@@ -569,7 +569,7 @@
           <a:p>
             <a:fld id="{48A87A34-81AB-432B-8DAE-1953F412C126}" type="datetimeFigureOut">
               <a:rPr lang="en-US" smtClean="0"/>
-              <a:t>5/9/2026</a:t>
+              <a:t>5/10/2026</a:t>
             </a:fld>
             <a:endParaRPr lang="en-US" dirty="0"/>
           </a:p>
@@ -800,7 +800,7 @@
           <a:p>
             <a:fld id="{48A87A34-81AB-432B-8DAE-1953F412C126}" type="datetimeFigureOut">
               <a:rPr lang="en-US" smtClean="0"/>
-              <a:t>5/9/2026</a:t>
+              <a:t>5/10/2026</a:t>
             </a:fld>
             <a:endParaRPr lang="en-US" dirty="0"/>
           </a:p>
@@ -1110,7 +1110,7 @@
           <a:p>
             <a:fld id="{48A87A34-81AB-432B-8DAE-1953F412C126}" type="datetimeFigureOut">
               <a:rPr lang="en-US" smtClean="0"/>
-              <a:t>5/9/2026</a:t>
+              <a:t>5/10/2026</a:t>
             </a:fld>
             <a:endParaRPr lang="en-US" dirty="0"/>
           </a:p>
@@ -1583,7 +1583,7 @@
           <a:p>
             <a:fld id="{48A87A34-81AB-432B-8DAE-1953F412C126}" type="datetimeFigureOut">
               <a:rPr lang="en-US" smtClean="0"/>
-              <a:t>5/9/2026</a:t>
+              <a:t>5/10/2026</a:t>
             </a:fld>
             <a:endParaRPr lang="en-US" dirty="0"/>
           </a:p>
@@ -2130,7 +2130,7 @@
           <a:p>
             <a:fld id="{48A87A34-81AB-432B-8DAE-1953F412C126}" type="datetimeFigureOut">
               <a:rPr lang="en-US" smtClean="0"/>
-              <a:t>5/9/2026</a:t>
+              <a:t>5/10/2026</a:t>
             </a:fld>
             <a:endParaRPr lang="en-US" dirty="0"/>
           </a:p>
@@ -2904,7 +2904,7 @@
           <a:p>
             <a:fld id="{48A87A34-81AB-432B-8DAE-1953F412C126}" type="datetimeFigureOut">
               <a:rPr lang="en-US" smtClean="0"/>
-              <a:t>5/9/2026</a:t>
+              <a:t>5/10/2026</a:t>
             </a:fld>
             <a:endParaRPr lang="en-US" dirty="0"/>
           </a:p>
@@ -3079,7 +3079,7 @@
           <a:p>
             <a:fld id="{48A87A34-81AB-432B-8DAE-1953F412C126}" type="datetimeFigureOut">
               <a:rPr lang="en-US" smtClean="0"/>
-              <a:t>5/9/2026</a:t>
+              <a:t>5/10/2026</a:t>
             </a:fld>
             <a:endParaRPr lang="en-US" dirty="0"/>
           </a:p>
@@ -3302,7 +3302,7 @@
           <a:p>
             <a:fld id="{48A87A34-81AB-432B-8DAE-1953F412C126}" type="datetimeFigureOut">
               <a:rPr lang="en-US" smtClean="0"/>
-              <a:t>5/9/2026</a:t>
+              <a:t>5/10/2026</a:t>
             </a:fld>
             <a:endParaRPr lang="en-US" dirty="0"/>
           </a:p>
@@ -3482,7 +3482,7 @@
           <a:p>
             <a:fld id="{48A87A34-81AB-432B-8DAE-1953F412C126}" type="datetimeFigureOut">
               <a:rPr lang="en-US" smtClean="0"/>
-              <a:t>5/9/2026</a:t>
+              <a:t>5/10/2026</a:t>
             </a:fld>
             <a:endParaRPr lang="en-US" dirty="0"/>
           </a:p>
@@ -3771,7 +3771,7 @@
           <a:p>
             <a:fld id="{48A87A34-81AB-432B-8DAE-1953F412C126}" type="datetimeFigureOut">
               <a:rPr lang="en-US" smtClean="0"/>
-              <a:t>5/9/2026</a:t>
+              <a:t>5/10/2026</a:t>
             </a:fld>
             <a:endParaRPr lang="en-US" dirty="0"/>
           </a:p>
@@ -4013,7 +4013,7 @@
           <a:p>
             <a:fld id="{48A87A34-81AB-432B-8DAE-1953F412C126}" type="datetimeFigureOut">
               <a:rPr lang="en-US" smtClean="0"/>
-              <a:t>5/9/2026</a:t>
+              <a:t>5/10/2026</a:t>
             </a:fld>
             <a:endParaRPr lang="en-US" dirty="0"/>
           </a:p>
@@ -4392,7 +4392,7 @@
           <a:p>
             <a:fld id="{48A87A34-81AB-432B-8DAE-1953F412C126}" type="datetimeFigureOut">
               <a:rPr lang="en-US" smtClean="0"/>
-              <a:t>5/9/2026</a:t>
+              <a:t>5/10/2026</a:t>
             </a:fld>
             <a:endParaRPr lang="en-US" dirty="0"/>
           </a:p>
@@ -4510,7 +4510,7 @@
           <a:p>
             <a:fld id="{48A87A34-81AB-432B-8DAE-1953F412C126}" type="datetimeFigureOut">
               <a:rPr lang="en-US" smtClean="0"/>
-              <a:t>5/9/2026</a:t>
+              <a:t>5/10/2026</a:t>
             </a:fld>
             <a:endParaRPr lang="en-US" dirty="0"/>
           </a:p>
@@ -4605,7 +4605,7 @@
           <a:p>
             <a:fld id="{48A87A34-81AB-432B-8DAE-1953F412C126}" type="datetimeFigureOut">
               <a:rPr lang="en-US" smtClean="0"/>
-              <a:t>5/9/2026</a:t>
+              <a:t>5/10/2026</a:t>
             </a:fld>
             <a:endParaRPr lang="en-US" dirty="0"/>
           </a:p>
@@ -4854,7 +4854,7 @@
           <a:p>
             <a:fld id="{48A87A34-81AB-432B-8DAE-1953F412C126}" type="datetimeFigureOut">
               <a:rPr lang="en-US" smtClean="0"/>
-              <a:t>5/9/2026</a:t>
+              <a:t>5/10/2026</a:t>
             </a:fld>
             <a:endParaRPr lang="en-US" dirty="0"/>
           </a:p>
@@ -5111,7 +5111,7 @@
           <a:p>
             <a:fld id="{48A87A34-81AB-432B-8DAE-1953F412C126}" type="datetimeFigureOut">
               <a:rPr lang="en-US" smtClean="0"/>
-              <a:t>5/9/2026</a:t>
+              <a:t>5/10/2026</a:t>
             </a:fld>
             <a:endParaRPr lang="en-US" dirty="0"/>
           </a:p>
@@ -5355,7 +5355,7 @@
             <a:fld id="{48A87A34-81AB-432B-8DAE-1953F412C126}" type="datetimeFigureOut">
               <a:rPr lang="en-US" smtClean="0"/>
               <a:pPr/>
-              <a:t>5/9/2026</a:t>
+              <a:t>5/10/2026</a:t>
             </a:fld>
             <a:endParaRPr lang="en-US" dirty="0"/>
           </a:p>
@@ -7278,7 +7278,13 @@
           <p:cNvGraphicFramePr>
             <a:graphicFrameLocks noGrp="1"/>
           </p:cNvGraphicFramePr>
-          <p:nvPr/>
+          <p:nvPr>
+            <p:extLst>
+              <p:ext uri="{D42A27DB-BD31-4B8C-83A1-F6EECF244321}">
+                <p14:modId xmlns:p14="http://schemas.microsoft.com/office/powerpoint/2010/main" val="1440324406"/>
+              </p:ext>
+            </p:extLst>
+          </p:nvPr>
         </p:nvGraphicFramePr>
         <p:xfrm>
           <a:off x="996287" y="1456643"/>
@@ -7509,8 +7515,17 @@
                         <a:rPr lang="en-US" b="0" dirty="0">
                           <a:latin typeface="Times New Roman" panose="02020603050405020304" pitchFamily="18" charset="0"/>
                         </a:rPr>
-                        <a:t>Frontend UI (Bootstrap + AJAX)</a:t>
+                        <a:t>Frontend UI </a:t>
                       </a:r>
+                      <a:r>
+                        <a:rPr lang="en-US" b="0">
+                          <a:latin typeface="Times New Roman" panose="02020603050405020304" pitchFamily="18" charset="0"/>
+                        </a:rPr>
+                        <a:t>(Bootstrap)</a:t>
+                      </a:r>
+                      <a:endParaRPr lang="en-US" b="0" dirty="0">
+                        <a:latin typeface="Times New Roman" panose="02020603050405020304" pitchFamily="18" charset="0"/>
+                      </a:endParaRPr>
                     </a:p>
                   </a:txBody>
                   <a:tcPr/>
